--- a/ゲーム科1年/00_前期/プログラミングⅠ/10_条件分岐.pptx
+++ b/ゲーム科1年/00_前期/プログラミングⅠ/10_条件分岐.pptx
@@ -271,7 +271,7 @@
           <a:p>
             <a:fld id="{E9CC885B-4903-4D54-9A93-00025F12DED9}" type="datetimeFigureOut">
               <a:rPr kumimoji="1" lang="ja-JP" altLang="en-US" smtClean="0"/>
-              <a:t>2024/11/14</a:t>
+              <a:t>2025/2/28</a:t>
             </a:fld>
             <a:endParaRPr kumimoji="1" lang="ja-JP" altLang="en-US"/>
           </a:p>
@@ -501,7 +501,7 @@
           <a:p>
             <a:fld id="{E9CC885B-4903-4D54-9A93-00025F12DED9}" type="datetimeFigureOut">
               <a:rPr kumimoji="1" lang="ja-JP" altLang="en-US" smtClean="0"/>
-              <a:t>2024/11/14</a:t>
+              <a:t>2025/2/28</a:t>
             </a:fld>
             <a:endParaRPr kumimoji="1" lang="ja-JP" altLang="en-US"/>
           </a:p>
@@ -741,7 +741,7 @@
           <a:p>
             <a:fld id="{E9CC885B-4903-4D54-9A93-00025F12DED9}" type="datetimeFigureOut">
               <a:rPr kumimoji="1" lang="ja-JP" altLang="en-US" smtClean="0"/>
-              <a:t>2024/11/14</a:t>
+              <a:t>2025/2/28</a:t>
             </a:fld>
             <a:endParaRPr kumimoji="1" lang="ja-JP" altLang="en-US"/>
           </a:p>
@@ -971,7 +971,7 @@
           <a:p>
             <a:fld id="{E9CC885B-4903-4D54-9A93-00025F12DED9}" type="datetimeFigureOut">
               <a:rPr kumimoji="1" lang="ja-JP" altLang="en-US" smtClean="0"/>
-              <a:t>2024/11/14</a:t>
+              <a:t>2025/2/28</a:t>
             </a:fld>
             <a:endParaRPr kumimoji="1" lang="ja-JP" altLang="en-US"/>
           </a:p>
@@ -1246,7 +1246,7 @@
           <a:p>
             <a:fld id="{E9CC885B-4903-4D54-9A93-00025F12DED9}" type="datetimeFigureOut">
               <a:rPr kumimoji="1" lang="ja-JP" altLang="en-US" smtClean="0"/>
-              <a:t>2024/11/14</a:t>
+              <a:t>2025/2/28</a:t>
             </a:fld>
             <a:endParaRPr kumimoji="1" lang="ja-JP" altLang="en-US"/>
           </a:p>
@@ -1575,7 +1575,7 @@
           <a:p>
             <a:fld id="{E9CC885B-4903-4D54-9A93-00025F12DED9}" type="datetimeFigureOut">
               <a:rPr kumimoji="1" lang="ja-JP" altLang="en-US" smtClean="0"/>
-              <a:t>2024/11/14</a:t>
+              <a:t>2025/2/28</a:t>
             </a:fld>
             <a:endParaRPr kumimoji="1" lang="ja-JP" altLang="en-US"/>
           </a:p>
@@ -2051,7 +2051,7 @@
           <a:p>
             <a:fld id="{E9CC885B-4903-4D54-9A93-00025F12DED9}" type="datetimeFigureOut">
               <a:rPr kumimoji="1" lang="ja-JP" altLang="en-US" smtClean="0"/>
-              <a:t>2024/11/14</a:t>
+              <a:t>2025/2/28</a:t>
             </a:fld>
             <a:endParaRPr kumimoji="1" lang="ja-JP" altLang="en-US"/>
           </a:p>
@@ -2192,7 +2192,7 @@
           <a:p>
             <a:fld id="{E9CC885B-4903-4D54-9A93-00025F12DED9}" type="datetimeFigureOut">
               <a:rPr kumimoji="1" lang="ja-JP" altLang="en-US" smtClean="0"/>
-              <a:t>2024/11/14</a:t>
+              <a:t>2025/2/28</a:t>
             </a:fld>
             <a:endParaRPr kumimoji="1" lang="ja-JP" altLang="en-US"/>
           </a:p>
@@ -2305,7 +2305,7 @@
           <a:p>
             <a:fld id="{E9CC885B-4903-4D54-9A93-00025F12DED9}" type="datetimeFigureOut">
               <a:rPr kumimoji="1" lang="ja-JP" altLang="en-US" smtClean="0"/>
-              <a:t>2024/11/14</a:t>
+              <a:t>2025/2/28</a:t>
             </a:fld>
             <a:endParaRPr kumimoji="1" lang="ja-JP" altLang="en-US"/>
           </a:p>
@@ -2648,7 +2648,7 @@
           <a:p>
             <a:fld id="{E9CC885B-4903-4D54-9A93-00025F12DED9}" type="datetimeFigureOut">
               <a:rPr kumimoji="1" lang="ja-JP" altLang="en-US" smtClean="0"/>
-              <a:t>2024/11/14</a:t>
+              <a:t>2025/2/28</a:t>
             </a:fld>
             <a:endParaRPr kumimoji="1" lang="ja-JP" altLang="en-US"/>
           </a:p>
@@ -2936,7 +2936,7 @@
           <a:p>
             <a:fld id="{E9CC885B-4903-4D54-9A93-00025F12DED9}" type="datetimeFigureOut">
               <a:rPr kumimoji="1" lang="ja-JP" altLang="en-US" smtClean="0"/>
-              <a:t>2024/11/14</a:t>
+              <a:t>2025/2/28</a:t>
             </a:fld>
             <a:endParaRPr kumimoji="1" lang="ja-JP" altLang="en-US"/>
           </a:p>
@@ -3209,7 +3209,7 @@
           <a:p>
             <a:fld id="{E9CC885B-4903-4D54-9A93-00025F12DED9}" type="datetimeFigureOut">
               <a:rPr kumimoji="1" lang="ja-JP" altLang="en-US" smtClean="0"/>
-              <a:t>2024/11/14</a:t>
+              <a:t>2025/2/28</a:t>
             </a:fld>
             <a:endParaRPr kumimoji="1" lang="ja-JP" altLang="en-US"/>
           </a:p>
@@ -5842,54 +5842,6 @@
           </a:prstGeom>
         </p:spPr>
       </p:pic>
-      <p:sp>
-        <p:nvSpPr>
-          <p:cNvPr id="7" name="テキスト ボックス 6">
-            <a:extLst>
-              <a:ext uri="{FF2B5EF4-FFF2-40B4-BE49-F238E27FC236}">
-                <a16:creationId xmlns:a16="http://schemas.microsoft.com/office/drawing/2014/main" id="{FEA8F757-B8D8-421F-8A24-9318097AFF78}"/>
-              </a:ext>
-            </a:extLst>
-          </p:cNvPr>
-          <p:cNvSpPr txBox="1"/>
-          <p:nvPr/>
-        </p:nvSpPr>
-        <p:spPr>
-          <a:xfrm>
-            <a:off x="567542" y="4950273"/>
-            <a:ext cx="9074920" cy="461665"/>
-          </a:xfrm>
-          <a:prstGeom prst="rect">
-            <a:avLst/>
-          </a:prstGeom>
-          <a:noFill/>
-        </p:spPr>
-        <p:txBody>
-          <a:bodyPr wrap="none" rtlCol="0">
-            <a:spAutoFit/>
-          </a:bodyPr>
-          <a:lstStyle/>
-          <a:p>
-            <a:r>
-              <a:rPr lang="ja-JP" altLang="en-US" sz="2400" dirty="0"/>
-              <a:t>このプログラムの</a:t>
-            </a:r>
-            <a:r>
-              <a:rPr lang="en-US" altLang="ja-JP" sz="2400" b="1" dirty="0">
-                <a:solidFill>
-                  <a:srgbClr val="0070C0"/>
-                </a:solidFill>
-              </a:rPr>
-              <a:t>else</a:t>
-            </a:r>
-            <a:r>
-              <a:rPr lang="ja-JP" altLang="en-US" sz="2400" dirty="0"/>
-              <a:t>だけを消すとどうなるか考えてみましょう</a:t>
-            </a:r>
-            <a:endParaRPr lang="en-US" altLang="ja-JP" sz="2400" dirty="0"/>
-          </a:p>
-        </p:txBody>
-      </p:sp>
     </p:spTree>
     <p:extLst>
       <p:ext uri="{BB962C8B-B14F-4D97-AF65-F5344CB8AC3E}">
